--- a/media/exports/reports/2025-10/volunteers.pptx
+++ b/media/exports/reports/2025-10/volunteers.pptx
@@ -200,19 +200,19 @@
                   <c:v>Volunteer coordinator</c:v>
                 </c:pt>
                 <c:pt idx="1">
-                  <c:v>Mental health first aid</c:v>
+                  <c:v>Community meals</c:v>
                 </c:pt>
                 <c:pt idx="2">
-                  <c:v>Community meals</c:v>
+                  <c:v>Mental health first aid</c:v>
                 </c:pt>
                 <c:pt idx="3">
                   <c:v>Youth outreach</c:v>
                 </c:pt>
                 <c:pt idx="4">
-                  <c:v>Digital literacy</c:v>
+                  <c:v>Housing support</c:v>
                 </c:pt>
                 <c:pt idx="5">
-                  <c:v>Housing support</c:v>
+                  <c:v>Digital literacy</c:v>
                 </c:pt>
               </c:strCache>
             </c:strRef>
@@ -224,22 +224,22 @@
                 <c:formatCode>#,##0;[Red](#,##0)</c:formatCode>
                 <c:ptCount val="6"/>
                 <c:pt idx="0">
-                  <c:v>78.5</c:v>
+                  <c:v>77.0</c:v>
                 </c:pt>
                 <c:pt idx="1">
-                  <c:v>85.0</c:v>
+                  <c:v>125.0</c:v>
                 </c:pt>
                 <c:pt idx="2">
-                  <c:v>96.0</c:v>
+                  <c:v>130.0</c:v>
                 </c:pt>
                 <c:pt idx="3">
-                  <c:v>124.0</c:v>
+                  <c:v>147.0</c:v>
                 </c:pt>
                 <c:pt idx="4">
-                  <c:v>135.5</c:v>
+                  <c:v>153.5</c:v>
                 </c:pt>
                 <c:pt idx="5">
-                  <c:v>150.5</c:v>
+                  <c:v>184.5</c:v>
                 </c:pt>
               </c:numCache>
             </c:numRef>
@@ -303,7 +303,7 @@
       <c:valAx>
         <c:axId val="-2113994440"/>
         <c:scaling>
-          <c:max val="173.075"/>
+          <c:max val="212.17499999999998"/>
           <c:min val="0.0"/>
         </c:scaling>
         <c:delete/>
@@ -436,43 +436,43 @@
                 <c:formatCode>#,##0;[Red](#,##0)</c:formatCode>
                 <c:ptCount val="13"/>
                 <c:pt idx="0">
-                  <c:v>317.5</c:v>
+                  <c:v>381.0</c:v>
                 </c:pt>
                 <c:pt idx="1">
-                  <c:v>392.0</c:v>
+                  <c:v>373.5</c:v>
                 </c:pt>
                 <c:pt idx="2">
-                  <c:v>363.5</c:v>
+                  <c:v>383.5</c:v>
                 </c:pt>
                 <c:pt idx="3">
-                  <c:v>399.0</c:v>
+                  <c:v>387.5</c:v>
                 </c:pt>
                 <c:pt idx="4">
-                  <c:v>422.0</c:v>
+                  <c:v>376.5</c:v>
                 </c:pt>
                 <c:pt idx="5">
-                  <c:v>451.5</c:v>
+                  <c:v>444.0</c:v>
                 </c:pt>
                 <c:pt idx="6">
-                  <c:v>445.0</c:v>
+                  <c:v>422.5</c:v>
                 </c:pt>
                 <c:pt idx="7">
-                  <c:v>513.0</c:v>
+                  <c:v>562.0</c:v>
                 </c:pt>
                 <c:pt idx="8">
-                  <c:v>529.0</c:v>
+                  <c:v>568.0</c:v>
                 </c:pt>
                 <c:pt idx="9">
-                  <c:v>586.0</c:v>
+                  <c:v>609.5</c:v>
                 </c:pt>
                 <c:pt idx="10">
-                  <c:v>560.5</c:v>
+                  <c:v>627.0</c:v>
                 </c:pt>
                 <c:pt idx="11">
-                  <c:v>625.5</c:v>
+                  <c:v>708.5</c:v>
                 </c:pt>
                 <c:pt idx="12">
-                  <c:v>669.5</c:v>
+                  <c:v>817.0</c:v>
                 </c:pt>
               </c:numCache>
             </c:numRef>
@@ -521,7 +521,7 @@
         <c:axId val="-2100718248"/>
         <c:scaling>
           <c:orientation val="minMax"/>
-          <c:max val="800.0"/>
+          <c:max val="1000.0"/>
           <c:min val="0.0"/>
         </c:scaling>
         <c:delete val="0"/>
@@ -1046,7 +1046,7 @@
           <a:lstStyle/>
           <a:p>
             <a:r>
-              <a:t>How many volunteer hours go into each program?. Volunteer hours, October: 669.5 h; Volunteers who did a shift, October: 44; Hours per volunteer, October: 15.2 h; October last year: 317.5 h. 44 volunteers gave 669.5 h in October, against 625.5 h in September. Housing support drew the most (150.5 h, 22.5%). Volunteer coordinator had the fewest volunteer hours (78.5 h). Hours are up 110.9% on October last year.</a:t>
+              <a:t>How many volunteer hours go into each program?. Volunteer hours, October: 817.0 h; Volunteers who did a shift, October: 54; Hours per volunteer, October: 15.1 h; October last year: 381.0 h. 54 volunteers gave 817.0 h in October, against 708.5 h in September. Digital literacy drew the most (184.5 h, 22.6%). Volunteer coordinator had the fewest volunteer hours (77.0 h). Hours are up 114.4% on October last year.</a:t>
             </a:r>
           </a:p>
         </p:txBody>
@@ -4531,7 +4531,7 @@
                 </a:solidFill>
                 <a:latin typeface="Roboto"/>
               </a:rPr>
-              <a:t>Data retrieved 2pm, Tue 6 Oct 2026 · Generated 8 Oct 2026, 6:29pm · Sample data · Made with Python (python-pptx)</a:t>
+              <a:t>Data retrieved 2pm, Tue 6 Oct 2026 · Generated 8 Oct 2026, 11:41pm · Sample data · Made with Python (python-pptx)</a:t>
             </a:r>
           </a:p>
         </p:txBody>
@@ -4877,7 +4877,7 @@
                 </a:solidFill>
                 <a:latin typeface="Roboto"/>
               </a:rPr>
-              <a:t>669.5 h</a:t>
+              <a:t>817.0 h</a:t>
             </a:r>
           </a:p>
         </p:txBody>
@@ -4916,7 +4916,7 @@
                 </a:solidFill>
                 <a:latin typeface="Roboto"/>
               </a:rPr>
-              <a:t>September 625.5 h</a:t>
+              <a:t>September 708.5 h</a:t>
             </a:r>
           </a:p>
         </p:txBody>
@@ -5043,7 +5043,7 @@
                 </a:solidFill>
                 <a:latin typeface="Roboto"/>
               </a:rPr>
-              <a:t>44</a:t>
+              <a:t>54</a:t>
             </a:r>
           </a:p>
         </p:txBody>
@@ -5082,7 +5082,7 @@
                 </a:solidFill>
                 <a:latin typeface="Roboto"/>
               </a:rPr>
-              <a:t>September 43</a:t>
+              <a:t>September 47</a:t>
             </a:r>
           </a:p>
         </p:txBody>
@@ -5209,7 +5209,7 @@
                 </a:solidFill>
                 <a:latin typeface="Roboto"/>
               </a:rPr>
-              <a:t>15.2 h</a:t>
+              <a:t>15.1 h</a:t>
             </a:r>
           </a:p>
         </p:txBody>
@@ -5375,7 +5375,7 @@
                 </a:solidFill>
                 <a:latin typeface="Roboto"/>
               </a:rPr>
-              <a:t>317.5 h</a:t>
+              <a:t>381.0 h</a:t>
             </a:r>
           </a:p>
         </p:txBody>
@@ -5414,7 +5414,7 @@
                 </a:solidFill>
                 <a:latin typeface="Roboto"/>
               </a:rPr>
-              <a:t>23 volunteers</a:t>
+              <a:t>25 volunteers</a:t>
             </a:r>
           </a:p>
         </p:txBody>
@@ -5559,7 +5559,7 @@
                 </a:solidFill>
                 <a:latin typeface="Roboto"/>
               </a:rPr>
-              <a:t>44 volunteers gave 669.5 h in October, against 625.5 h in September. Housing support drew the most (150.5 h, 22.5%).</a:t>
+              <a:t>54 volunteers gave 817.0 h in October, against 708.5 h in September. Digital literacy drew the most (184.5 h, 22.6%).</a:t>
             </a:r>
           </a:p>
         </p:txBody>
@@ -5686,7 +5686,7 @@
                 </a:solidFill>
                 <a:latin typeface="Roboto"/>
               </a:rPr>
-              <a:t>Volunteer coordinator had the fewest volunteer hours (78.5 h). Hours are up 110.9% on October last year.</a:t>
+              <a:t>Volunteer coordinator had the fewest volunteer hours (77.0 h). Hours are up 114.4% on October last year.</a:t>
             </a:r>
           </a:p>
         </p:txBody>
@@ -5764,7 +5764,7 @@
                 </a:solidFill>
                 <a:latin typeface="Roboto"/>
               </a:rPr>
-              <a:t>Data retrieved 2pm, Tue 6 Oct 2026 · Generated 8 Oct 2026, 6:29pm · Sample data · Made with Python (python-pptx)</a:t>
+              <a:t>Data retrieved 2pm, Tue 6 Oct 2026 · Generated 8 Oct 2026, 11:41pm · Sample data · Made with Python (python-pptx)</a:t>
             </a:r>
           </a:p>
         </p:txBody>
@@ -6079,7 +6079,7 @@
                 </a:solidFill>
                 <a:latin typeface="Roboto"/>
               </a:rPr>
-              <a:t>Data retrieved 2pm, Tue 6 Oct 2026 · Generated 8 Oct 2026, 6:29pm · Sample data · Made with Python (python-pptx)</a:t>
+              <a:t>Data retrieved 2pm, Tue 6 Oct 2026 · Generated 8 Oct 2026, 11:41pm · Sample data · Made with Python (python-pptx)</a:t>
             </a:r>
           </a:p>
         </p:txBody>

--- a/media/exports/reports/2025-10/volunteers.pptx
+++ b/media/exports/reports/2025-10/volunteers.pptx
@@ -976,7 +976,7 @@
           <a:lstStyle/>
           <a:p>
             <a:r>
-              <a:t>How many volunteer hours go into each program?. Sample Community Services Ltd. Period: October 2025. Every volunteer shift: who (a code, not a name), which program, and how many hours.</a:t>
+              <a:t>How many volunteer hours go into each program?. Sample Community Services Ltd. Period: October 2025. In short: 817.0 h of volunteer time in October, from 54 volunteers; most went to Digital literacy. Every volunteer shift: who (a code, not a name), which program, and how many hours.</a:t>
             </a:r>
           </a:p>
         </p:txBody>
@@ -4341,7 +4341,7 @@
         <p:spPr>
           <a:xfrm>
             <a:off x="457200" y="3703320"/>
-            <a:ext cx="11277295" cy="313690"/>
+            <a:ext cx="11277295" cy="535940"/>
           </a:xfrm>
           <a:prstGeom prst="rect">
             <a:avLst/>
@@ -4366,7 +4366,7 @@
                 </a:solidFill>
                 <a:latin typeface="Roboto"/>
               </a:rPr>
-              <a:t>Period: October 2025. Every volunteer shift: who (a code, not a name), which program, and how many hours.</a:t>
+              <a:t>Period: October 2025. In short: 817.0 h of volunteer time in October, from 54 volunteers; most went to Digital literacy. Every volunteer shift: who (a code, not a name), which program, and how many hours.</a:t>
             </a:r>
           </a:p>
         </p:txBody>
@@ -4379,7 +4379,7 @@
         </p:nvSpPr>
         <p:spPr>
           <a:xfrm>
-            <a:off x="457200" y="4108450"/>
+            <a:off x="457200" y="4330700"/>
             <a:ext cx="11277295" cy="1097280"/>
           </a:xfrm>
           <a:prstGeom prst="rect">
@@ -4531,7 +4531,7 @@
                 </a:solidFill>
                 <a:latin typeface="Roboto"/>
               </a:rPr>
-              <a:t>Data retrieved 2pm, Tue 6 Oct 2026 · Generated 8 Oct 2026, 11:41pm · Sample data · Made with Python (python-pptx)</a:t>
+              <a:t>Data retrieved 2pm, Tue 6 Oct 2026 · Generated 10 Oct 2026, 9:55pm · Sample data · Made with Python (python-pptx)</a:t>
             </a:r>
           </a:p>
         </p:txBody>
@@ -5764,7 +5764,7 @@
                 </a:solidFill>
                 <a:latin typeface="Roboto"/>
               </a:rPr>
-              <a:t>Data retrieved 2pm, Tue 6 Oct 2026 · Generated 8 Oct 2026, 11:41pm · Sample data · Made with Python (python-pptx)</a:t>
+              <a:t>Data retrieved 2pm, Tue 6 Oct 2026 · Generated 10 Oct 2026, 9:55pm · Sample data · Made with Python (python-pptx)</a:t>
             </a:r>
           </a:p>
         </p:txBody>
@@ -6079,7 +6079,7 @@
                 </a:solidFill>
                 <a:latin typeface="Roboto"/>
               </a:rPr>
-              <a:t>Data retrieved 2pm, Tue 6 Oct 2026 · Generated 8 Oct 2026, 11:41pm · Sample data · Made with Python (python-pptx)</a:t>
+              <a:t>Data retrieved 2pm, Tue 6 Oct 2026 · Generated 10 Oct 2026, 9:55pm · Sample data · Made with Python (python-pptx)</a:t>
             </a:r>
           </a:p>
         </p:txBody>
